--- a/proyecto_intermodular/Actividad1_Tomas_Cabello.pptx
+++ b/proyecto_intermodular/Actividad1_Tomas_Cabello.pptx
@@ -21896,7 +21896,7 @@
         </p:nvSpPr>
         <p:spPr>
           <a:xfrm>
-            <a:off x="619856" y="2697779"/>
+            <a:off x="619856" y="2776969"/>
             <a:ext cx="2469939" cy="1800280"/>
           </a:xfrm>
           <a:prstGeom prst="rect">

--- a/proyecto_intermodular/Actividad1_Tomas_Cabello.pptx
+++ b/proyecto_intermodular/Actividad1_Tomas_Cabello.pptx
@@ -18611,7 +18611,7 @@
           <p:nvPr>
             <p:extLst>
               <p:ext uri="{D42A27DB-BD31-4B8C-83A1-F6EECF244321}">
-                <p14:modId xmlns:p14="http://schemas.microsoft.com/office/powerpoint/2010/main" val="4174842761"/>
+                <p14:modId xmlns:p14="http://schemas.microsoft.com/office/powerpoint/2010/main" val="378651241"/>
               </p:ext>
             </p:extLst>
           </p:nvPr>
@@ -20429,7 +20429,7 @@
                           <a:cs typeface="Actor"/>
                           <a:sym typeface="Actor"/>
                         </a:rPr>
-                        <a:t>Pyme (Industrial)</a:t>
+                        <a:t>Pyme</a:t>
                       </a:r>
                       <a:endParaRPr sz="1600" dirty="0">
                         <a:solidFill>
@@ -22519,7 +22519,7 @@
         </p:nvSpPr>
         <p:spPr>
           <a:xfrm>
-            <a:off x="720000" y="445025"/>
+            <a:off x="720000" y="258849"/>
             <a:ext cx="7704000" cy="572700"/>
           </a:xfrm>
           <a:prstGeom prst="rect">
@@ -22565,7 +22565,7 @@
         </p:nvCxnSpPr>
         <p:spPr>
           <a:xfrm rot="10800000" flipV="1">
-            <a:off x="953080" y="1366485"/>
+            <a:off x="953080" y="1073949"/>
             <a:ext cx="12700" cy="1833846"/>
           </a:xfrm>
           <a:prstGeom prst="bentConnector3">
@@ -22597,8 +22597,8 @@
         </p:nvCxnSpPr>
         <p:spPr>
           <a:xfrm rot="10800000" flipH="1" flipV="1">
-            <a:off x="953079" y="3200331"/>
-            <a:ext cx="12701" cy="1071386"/>
+            <a:off x="953079" y="2907794"/>
+            <a:ext cx="12701" cy="1197165"/>
           </a:xfrm>
           <a:prstGeom prst="bentConnector3">
             <a:avLst>
@@ -22625,7 +22625,7 @@
         </p:nvSpPr>
         <p:spPr>
           <a:xfrm>
-            <a:off x="876878" y="3686867"/>
+            <a:off x="876878" y="3394331"/>
             <a:ext cx="6484040" cy="484800"/>
           </a:xfrm>
           <a:prstGeom prst="rect">
@@ -22686,8 +22686,8 @@
         </p:nvSpPr>
         <p:spPr>
           <a:xfrm>
-            <a:off x="965781" y="3987017"/>
-            <a:ext cx="6788839" cy="569400"/>
+            <a:off x="965781" y="3694480"/>
+            <a:ext cx="6788839" cy="820960"/>
           </a:xfrm>
           <a:prstGeom prst="rect">
             <a:avLst/>
@@ -22742,6 +22742,61 @@
               </a:rPr>
               <a:t>. En lugar de vender horas de programación, crear un producto software propio que resuelva una necesidad y venderlo al mundo.</a:t>
             </a:r>
+          </a:p>
+          <a:p>
+            <a:pPr marL="0" lvl="0" indent="0" rtl="0">
+              <a:lnSpc>
+                <a:spcPct val="115000"/>
+              </a:lnSpc>
+              <a:spcBef>
+                <a:spcPts val="0"/>
+              </a:spcBef>
+              <a:spcAft>
+                <a:spcPts val="0"/>
+              </a:spcAft>
+              <a:buNone/>
+            </a:pPr>
+            <a:r>
+              <a:rPr lang="es-ES" dirty="0">
+                <a:solidFill>
+                  <a:schemeClr val="bg1"/>
+                </a:solidFill>
+                <a:latin typeface="Actor" panose="020B0604020202020204" charset="0"/>
+              </a:rPr>
+              <a:t>Por ejemplo, desarrollar sistemas </a:t>
+            </a:r>
+            <a:r>
+              <a:rPr lang="es-ES" dirty="0" err="1">
+                <a:solidFill>
+                  <a:schemeClr val="bg1"/>
+                </a:solidFill>
+                <a:latin typeface="Actor" panose="020B0604020202020204" charset="0"/>
+              </a:rPr>
+              <a:t>Odoo</a:t>
+            </a:r>
+            <a:r>
+              <a:rPr lang="es-ES" dirty="0">
+                <a:solidFill>
+                  <a:schemeClr val="bg1"/>
+                </a:solidFill>
+                <a:latin typeface="Actor" panose="020B0604020202020204" charset="0"/>
+              </a:rPr>
+              <a:t> para todo tipo de empresas que necesiten contabilidad.</a:t>
+            </a:r>
+          </a:p>
+          <a:p>
+            <a:pPr marL="0" lvl="0" indent="0" rtl="0">
+              <a:lnSpc>
+                <a:spcPct val="115000"/>
+              </a:lnSpc>
+              <a:spcBef>
+                <a:spcPts val="0"/>
+              </a:spcBef>
+              <a:spcAft>
+                <a:spcPts val="0"/>
+              </a:spcAft>
+              <a:buNone/>
+            </a:pPr>
             <a:endParaRPr dirty="0">
               <a:solidFill>
                 <a:schemeClr val="bg1"/>
@@ -22762,7 +22817,7 @@
         </p:nvSpPr>
         <p:spPr>
           <a:xfrm>
-            <a:off x="720000" y="2497054"/>
+            <a:off x="720000" y="2204518"/>
             <a:ext cx="5564443" cy="484800"/>
           </a:xfrm>
           <a:prstGeom prst="rect">
@@ -22823,7 +22878,7 @@
         </p:nvSpPr>
         <p:spPr>
           <a:xfrm>
-            <a:off x="953080" y="2800627"/>
+            <a:off x="953080" y="2508091"/>
             <a:ext cx="6788839" cy="799408"/>
           </a:xfrm>
           <a:prstGeom prst="rect">
@@ -22899,7 +22954,7 @@
         </p:nvSpPr>
         <p:spPr>
           <a:xfrm>
-            <a:off x="953080" y="1124085"/>
+            <a:off x="953080" y="831549"/>
             <a:ext cx="5393780" cy="484800"/>
           </a:xfrm>
           <a:prstGeom prst="rect">
@@ -22972,7 +23027,7 @@
         </p:nvSpPr>
         <p:spPr>
           <a:xfrm>
-            <a:off x="953080" y="1511932"/>
+            <a:off x="953080" y="1219396"/>
             <a:ext cx="6788839" cy="901713"/>
           </a:xfrm>
           <a:prstGeom prst="rect">
@@ -23044,7 +23099,7 @@
         </p:blipFill>
         <p:spPr>
           <a:xfrm>
-            <a:off x="7600958" y="2739454"/>
+            <a:off x="7600958" y="2446918"/>
             <a:ext cx="758876" cy="758876"/>
           </a:xfrm>
           <a:prstGeom prst="rect">
@@ -23074,7 +23129,7 @@
         </p:blipFill>
         <p:spPr>
           <a:xfrm>
-            <a:off x="7600959" y="1659542"/>
+            <a:off x="7600959" y="1367006"/>
             <a:ext cx="758876" cy="758876"/>
           </a:xfrm>
           <a:prstGeom prst="rect">
@@ -23104,7 +23159,7 @@
         </p:blipFill>
         <p:spPr>
           <a:xfrm>
-            <a:off x="7536793" y="3728064"/>
+            <a:off x="7536793" y="3661356"/>
             <a:ext cx="887205" cy="887205"/>
           </a:xfrm>
           <a:prstGeom prst="rect">
@@ -26205,10 +26260,19 @@
                 </a:solidFill>
                 <a:latin typeface="Actor" panose="020B0604020202020204" charset="0"/>
               </a:rPr>
-              <a:t>Web de Diputación de Córdoba: Información sobre servicios de </a:t>
+              <a:t>Web de Diputación de Córdoba: </a:t>
             </a:r>
             <a:r>
-              <a:rPr lang="es-ES" b="1" dirty="0" err="1">
+              <a:rPr lang="es-ES" dirty="0">
+                <a:solidFill>
+                  <a:schemeClr val="bg1"/>
+                </a:solidFill>
+                <a:latin typeface="Actor" panose="020B0604020202020204" charset="0"/>
+              </a:rPr>
+              <a:t>Información sobre servicios de </a:t>
+            </a:r>
+            <a:r>
+              <a:rPr lang="es-ES" dirty="0" err="1">
                 <a:solidFill>
                   <a:schemeClr val="bg1"/>
                 </a:solidFill>
@@ -26217,7 +26281,7 @@
               <a:t>Eprinsa</a:t>
             </a:r>
             <a:r>
-              <a:rPr lang="es-ES" b="1" dirty="0">
+              <a:rPr lang="es-ES" dirty="0">
                 <a:solidFill>
                   <a:schemeClr val="bg1"/>
                 </a:solidFill>
@@ -26225,12 +26289,6 @@
               </a:rPr>
               <a:t>.</a:t>
             </a:r>
-            <a:endParaRPr lang="es-ES" dirty="0">
-              <a:solidFill>
-                <a:schemeClr val="bg1"/>
-              </a:solidFill>
-              <a:latin typeface="Actor" panose="020B0604020202020204" charset="0"/>
-            </a:endParaRPr>
           </a:p>
           <a:p>
             <a:endParaRPr lang="es-ES" dirty="0"/>
